--- a/media/resources/files/Onduktar_Boluu_1denAz_TuuraJeKata_ .pptx
+++ b/media/resources/files/Onduktar_Boluu_1denAz_TuuraJeKata_ .pptx
@@ -7498,7 +7498,7 @@
             </a:pPr>
             <a:r>
               <a:rPr lang="ru-RU" dirty="0"/>
-              <a:t>Турдуу пикирлер учун ыраазычылык билдиребиз.</a:t>
+              <a:t>Түрдүү пикирлер үчүн ыраазычылык билдиребиз.</a:t>
             </a:r>
           </a:p>
           <a:p>

--- a/media/resources/files/Onduktar_Boluu_1denAz_TuuraJeKata_ .pptx
+++ b/media/resources/files/Onduktar_Boluu_1denAz_TuuraJeKata_ .pptx
@@ -4568,7 +4568,7 @@
           <a:p>
             <a:r>
               <a:rPr lang="ru-RU" dirty="0"/>
-              <a:t>Бул ресурс математикалык ыкманын жандуу демонстрацияларын камсыз кылат.</a:t>
+              <a:t>Бул ресурс ыкманы жандуу көрсөтөт.</a:t>
             </a:r>
           </a:p>
           <a:p>
@@ -5969,7 +5969,7 @@
             <a:pPr algn="ctr"/>
             <a:r>
               <a:rPr lang="en-GB" sz="3200" dirty="0"/>
-              <a:t>7 ÷ 0.1</a:t>
+              <a:t>7 ÷ 0,1</a:t>
             </a:r>
           </a:p>
         </p:txBody>
@@ -6196,7 +6196,7 @@
             <a:pPr algn="ctr"/>
             <a:r>
               <a:rPr lang="en-GB" sz="3200" dirty="0"/>
-              <a:t>6 ÷ 0.2</a:t>
+              <a:t>6 ÷ 0,2</a:t>
             </a:r>
           </a:p>
         </p:txBody>
@@ -6309,7 +6309,7 @@
             <a:pPr algn="ctr"/>
             <a:r>
               <a:rPr lang="en-GB" sz="3200" dirty="0"/>
-              <a:t>2.4 ÷ 0.2</a:t>
+              <a:t>2,4 ÷ 0,2</a:t>
             </a:r>
           </a:p>
         </p:txBody>
@@ -6418,7 +6418,7 @@
             <a:pPr algn="ctr"/>
             <a:r>
               <a:rPr lang="en-GB" sz="3200" dirty="0"/>
-              <a:t>12 ÷ 0.6 = 120 ÷ 6 = 20</a:t>
+              <a:t>12 ÷ 0,6 = 120 ÷ 6 = 20</a:t>
             </a:r>
           </a:p>
         </p:txBody>
@@ -6454,7 +6454,7 @@
             <a:pPr algn="ctr"/>
             <a:r>
               <a:rPr lang="en-GB" sz="3200" dirty="0"/>
-              <a:t>9 ÷ 0.5</a:t>
+              <a:t>9 ÷ 0,5</a:t>
             </a:r>
           </a:p>
         </p:txBody>
@@ -6563,7 +6563,7 @@
             <a:pPr algn="ctr"/>
             <a:r>
               <a:rPr lang="en-GB" sz="3200" dirty="0"/>
-              <a:t>4 ÷ 0.5 = 400 ÷ 5</a:t>
+              <a:t>4 ÷ 0,5 = 400 ÷ 5</a:t>
             </a:r>
           </a:p>
         </p:txBody>
@@ -6599,7 +6599,7 @@
             <a:pPr algn="ctr"/>
             <a:r>
               <a:rPr lang="en-GB" sz="3200" dirty="0"/>
-              <a:t>4 ÷ 0.8 = 5</a:t>
+              <a:t>4 ÷ 0,8 = 5</a:t>
             </a:r>
           </a:p>
         </p:txBody>
@@ -6635,7 +6635,7 @@
             <a:pPr algn="ctr"/>
             <a:r>
               <a:rPr lang="en-GB" sz="3200" dirty="0"/>
-              <a:t>36 ÷ 0.9 = 400</a:t>
+              <a:t>36 ÷ 0,9 = 400</a:t>
             </a:r>
           </a:p>
         </p:txBody>
@@ -6671,7 +6671,7 @@
             <a:pPr algn="ctr"/>
             <a:r>
               <a:rPr lang="en-GB" sz="3200" dirty="0"/>
-              <a:t>2 ÷ 0.25 = 200 ÷ 25 = 8 </a:t>
+              <a:t>2 ÷ 0,25 = 200 ÷ 25 = 8 </a:t>
             </a:r>
           </a:p>
         </p:txBody>
@@ -6707,7 +6707,7 @@
             <a:pPr algn="ctr"/>
             <a:r>
               <a:rPr lang="en-GB" sz="3200" dirty="0"/>
-              <a:t>15 ÷ 0.01 = 150</a:t>
+              <a:t>15 ÷ 0,01 = 150</a:t>
             </a:r>
           </a:p>
         </p:txBody>
@@ -6988,7 +6988,7 @@
             <a:pPr algn="ctr"/>
             <a:r>
               <a:rPr lang="en-GB" sz="3200" dirty="0"/>
-              <a:t>6 ÷ 0.02 = 200</a:t>
+              <a:t>6 ÷ 0,02 = 200</a:t>
             </a:r>
           </a:p>
         </p:txBody>
@@ -7067,7 +7067,7 @@
             <a:pPr algn="ctr"/>
             <a:r>
               <a:rPr lang="en-GB" sz="3200" dirty="0"/>
-              <a:t>5 ÷ 0.2 = 25</a:t>
+              <a:t>5 ÷ 0,2 = 25</a:t>
             </a:r>
           </a:p>
         </p:txBody>
@@ -9060,7 +9060,7 @@
             <a:pPr algn="ctr"/>
             <a:r>
               <a:rPr lang="en-GB" sz="3200" dirty="0"/>
-              <a:t>7 ÷ 0.1</a:t>
+              <a:t>7 ÷ 0,1</a:t>
             </a:r>
           </a:p>
         </p:txBody>
@@ -9221,7 +9221,7 @@
             <a:pPr algn="ctr"/>
             <a:r>
               <a:rPr lang="en-GB" sz="3200" dirty="0"/>
-              <a:t>6 ÷ 0.2</a:t>
+              <a:t>6 ÷ 0,2</a:t>
             </a:r>
           </a:p>
         </p:txBody>
@@ -9330,7 +9330,7 @@
             <a:pPr algn="ctr"/>
             <a:r>
               <a:rPr lang="en-GB" sz="3200" dirty="0"/>
-              <a:t>2.4 ÷ 0.2</a:t>
+              <a:t>2,4 ÷ 0,2</a:t>
             </a:r>
           </a:p>
         </p:txBody>
@@ -9443,7 +9443,7 @@
             <a:pPr algn="ctr"/>
             <a:r>
               <a:rPr lang="en-GB" sz="3200" dirty="0"/>
-              <a:t>12 ÷ 0.6 = 120 ÷ 6 = 20</a:t>
+              <a:t>12 ÷ 0,6 = 120 ÷ 6 = 20</a:t>
             </a:r>
           </a:p>
         </p:txBody>
@@ -9479,7 +9479,7 @@
             <a:pPr algn="ctr"/>
             <a:r>
               <a:rPr lang="en-GB" sz="3200" dirty="0"/>
-              <a:t>9 ÷ 0.5</a:t>
+              <a:t>9 ÷ 0,5</a:t>
             </a:r>
           </a:p>
         </p:txBody>
@@ -9592,7 +9592,7 @@
             <a:pPr algn="ctr"/>
             <a:r>
               <a:rPr lang="en-GB" sz="3200" dirty="0"/>
-              <a:t>4 ÷ 0.5 = 400 ÷ 5</a:t>
+              <a:t>4 ÷ 0,5 = 400 ÷ 5</a:t>
             </a:r>
           </a:p>
         </p:txBody>
@@ -9628,7 +9628,7 @@
             <a:pPr algn="ctr"/>
             <a:r>
               <a:rPr lang="en-GB" sz="3200" dirty="0"/>
-              <a:t>4 ÷ 0.8 = 5</a:t>
+              <a:t>4 ÷ 0,8 = 5</a:t>
             </a:r>
           </a:p>
         </p:txBody>
@@ -9664,7 +9664,7 @@
             <a:pPr algn="ctr"/>
             <a:r>
               <a:rPr lang="en-GB" sz="3200" dirty="0"/>
-              <a:t>36 ÷ 0.9 = 400</a:t>
+              <a:t>36 ÷ 0,9 = 400</a:t>
             </a:r>
           </a:p>
         </p:txBody>
@@ -9700,7 +9700,7 @@
             <a:pPr algn="ctr"/>
             <a:r>
               <a:rPr lang="en-GB" sz="3200" dirty="0"/>
-              <a:t>2 ÷ 0.25 = 200 ÷ 25 = 8 </a:t>
+              <a:t>2 ÷ 0,25 = 200 ÷ 25 = 8 </a:t>
             </a:r>
           </a:p>
         </p:txBody>
@@ -9736,7 +9736,7 @@
             <a:pPr algn="ctr"/>
             <a:r>
               <a:rPr lang="en-GB" sz="3200" dirty="0"/>
-              <a:t>15 ÷ 0.01 = 150</a:t>
+              <a:t>15 ÷ 0,01 = 150</a:t>
             </a:r>
           </a:p>
         </p:txBody>
@@ -9772,7 +9772,7 @@
             <a:pPr algn="ctr"/>
             <a:r>
               <a:rPr lang="en-GB" sz="3200" dirty="0"/>
-              <a:t>6 ÷ 0.02 = 200</a:t>
+              <a:t>6 ÷ 0,02 = 200</a:t>
             </a:r>
           </a:p>
         </p:txBody>
@@ -9808,7 +9808,7 @@
             <a:pPr algn="ctr"/>
             <a:r>
               <a:rPr lang="en-GB" sz="3200" dirty="0"/>
-              <a:t>5 ÷ 0.2 = 25</a:t>
+              <a:t>5 ÷ 0,2 = 25</a:t>
             </a:r>
           </a:p>
         </p:txBody>
@@ -10515,7 +10515,7 @@
             <a:pPr algn="ctr"/>
             <a:r>
               <a:rPr lang="en-GB" sz="3200" dirty="0"/>
-              <a:t>7 ÷ 0.1</a:t>
+              <a:t>7 ÷ 0,1</a:t>
             </a:r>
           </a:p>
         </p:txBody>
@@ -10746,7 +10746,7 @@
             <a:pPr algn="ctr"/>
             <a:r>
               <a:rPr lang="en-GB" sz="3200" dirty="0"/>
-              <a:t>6 ÷ 0.2</a:t>
+              <a:t>6 ÷ 0,2</a:t>
             </a:r>
           </a:p>
         </p:txBody>
@@ -10859,7 +10859,7 @@
             <a:pPr algn="ctr"/>
             <a:r>
               <a:rPr lang="en-GB" sz="3200" dirty="0"/>
-              <a:t>12 ÷ 0.6 = 120 ÷ 6 = 20</a:t>
+              <a:t>12 ÷ 0,6 = 120 ÷ 6 = 20</a:t>
             </a:r>
           </a:p>
         </p:txBody>
@@ -10895,7 +10895,7 @@
             <a:pPr algn="ctr"/>
             <a:r>
               <a:rPr lang="en-GB" sz="3200" dirty="0"/>
-              <a:t>9 ÷ 0.5</a:t>
+              <a:t>9 ÷ 0,5</a:t>
             </a:r>
           </a:p>
         </p:txBody>
@@ -11008,7 +11008,7 @@
             <a:pPr algn="ctr"/>
             <a:r>
               <a:rPr lang="en-GB" sz="3200" dirty="0"/>
-              <a:t>4 ÷ 0.5 = 400 ÷ 5</a:t>
+              <a:t>4 ÷ 0,5 = 400 ÷ 5</a:t>
             </a:r>
           </a:p>
         </p:txBody>
@@ -11149,7 +11149,7 @@
             <a:pPr algn="ctr"/>
             <a:r>
               <a:rPr lang="en-GB" sz="3200" dirty="0"/>
-              <a:t>5 ÷ 0.2 = 25</a:t>
+              <a:t>5 ÷ 0,2 = 25</a:t>
             </a:r>
           </a:p>
         </p:txBody>
@@ -12531,7 +12531,7 @@
             <a:pPr algn="ctr"/>
             <a:r>
               <a:rPr lang="en-GB" sz="3200" dirty="0"/>
-              <a:t>7 ÷ 0.1</a:t>
+              <a:t>7 ÷ 0,1</a:t>
             </a:r>
           </a:p>
         </p:txBody>
@@ -12762,7 +12762,7 @@
             <a:pPr algn="ctr"/>
             <a:r>
               <a:rPr lang="en-GB" sz="3200" dirty="0"/>
-              <a:t>6 ÷ 0.2</a:t>
+              <a:t>6 ÷ 0,2</a:t>
             </a:r>
           </a:p>
         </p:txBody>
@@ -12871,7 +12871,7 @@
             <a:pPr algn="ctr"/>
             <a:r>
               <a:rPr lang="en-GB" sz="3200" dirty="0"/>
-              <a:t>2.4 ÷ 0.2</a:t>
+              <a:t>2,4 ÷ 0,2</a:t>
             </a:r>
           </a:p>
         </p:txBody>
@@ -12984,7 +12984,7 @@
             <a:pPr algn="ctr"/>
             <a:r>
               <a:rPr lang="en-GB" sz="3200" dirty="0"/>
-              <a:t>12 ÷ 0.6 = 120 ÷ 6 = 20</a:t>
+              <a:t>12 ÷ 0,6 = 120 ÷ 6 = 20</a:t>
             </a:r>
           </a:p>
         </p:txBody>
@@ -13020,7 +13020,7 @@
             <a:pPr algn="ctr"/>
             <a:r>
               <a:rPr lang="en-GB" sz="3200" dirty="0"/>
-              <a:t>9 ÷ 0.5</a:t>
+              <a:t>9 ÷ 0,5</a:t>
             </a:r>
           </a:p>
         </p:txBody>
@@ -13133,7 +13133,7 @@
             <a:pPr algn="ctr"/>
             <a:r>
               <a:rPr lang="en-GB" sz="3200" dirty="0"/>
-              <a:t>4 ÷ 0.5 = 400 ÷ 5</a:t>
+              <a:t>4 ÷ 0,5 = 400 ÷ 5</a:t>
             </a:r>
           </a:p>
         </p:txBody>
@@ -13169,7 +13169,7 @@
             <a:pPr algn="ctr"/>
             <a:r>
               <a:rPr lang="en-GB" sz="3200" dirty="0"/>
-              <a:t>4 ÷ 0.8 = 5</a:t>
+              <a:t>4 ÷ 0,8 = 5</a:t>
             </a:r>
           </a:p>
         </p:txBody>
@@ -13205,7 +13205,7 @@
             <a:pPr algn="ctr"/>
             <a:r>
               <a:rPr lang="en-GB" sz="3200" dirty="0"/>
-              <a:t>36 ÷ 0.9 = 400</a:t>
+              <a:t>36 ÷ 0,9 = 400</a:t>
             </a:r>
           </a:p>
         </p:txBody>
@@ -13241,7 +13241,7 @@
             <a:pPr algn="ctr"/>
             <a:r>
               <a:rPr lang="en-GB" sz="3200" dirty="0"/>
-              <a:t>2 ÷ 0.25 = 200 ÷ 25 = 8 </a:t>
+              <a:t>2 ÷ 0,25 = 200 ÷ 25 = 8 </a:t>
             </a:r>
           </a:p>
         </p:txBody>
@@ -13277,7 +13277,7 @@
             <a:pPr algn="ctr"/>
             <a:r>
               <a:rPr lang="en-GB" sz="3200" dirty="0"/>
-              <a:t>15 ÷ 0.01 = 150</a:t>
+              <a:t>15 ÷ 0,01 = 150</a:t>
             </a:r>
           </a:p>
         </p:txBody>
@@ -13558,7 +13558,7 @@
             <a:pPr algn="ctr"/>
             <a:r>
               <a:rPr lang="en-GB" sz="3200" dirty="0"/>
-              <a:t>6 ÷ 0.02 = 200</a:t>
+              <a:t>6 ÷ 0,02 = 200</a:t>
             </a:r>
           </a:p>
         </p:txBody>
@@ -13594,7 +13594,7 @@
             <a:pPr algn="ctr"/>
             <a:r>
               <a:rPr lang="en-GB" sz="3200" dirty="0"/>
-              <a:t>5 ÷ 0.2 = 25</a:t>
+              <a:t>5 ÷ 0,2 = 25</a:t>
             </a:r>
           </a:p>
         </p:txBody>
@@ -14991,7 +14991,7 @@
             <a:pPr algn="ctr"/>
             <a:r>
               <a:rPr lang="en-GB" sz="3200" dirty="0"/>
-              <a:t>7 ÷ 0.1</a:t>
+              <a:t>7 ÷ 0,1</a:t>
             </a:r>
           </a:p>
         </p:txBody>
@@ -15148,7 +15148,7 @@
             <a:pPr algn="ctr"/>
             <a:r>
               <a:rPr lang="en-GB" sz="3200" dirty="0"/>
-              <a:t>6 ÷ 0.2</a:t>
+              <a:t>6 ÷ 0,2</a:t>
             </a:r>
           </a:p>
         </p:txBody>
@@ -15261,7 +15261,7 @@
             <a:pPr algn="ctr"/>
             <a:r>
               <a:rPr lang="en-GB" sz="3200" dirty="0"/>
-              <a:t>2.4 ÷ 0.2</a:t>
+              <a:t>2,4 ÷ 0,2</a:t>
             </a:r>
           </a:p>
         </p:txBody>
@@ -15374,7 +15374,7 @@
             <a:pPr algn="ctr"/>
             <a:r>
               <a:rPr lang="en-GB" sz="3200" dirty="0"/>
-              <a:t>12 ÷ 0.6 = 120 ÷ 6 = 20</a:t>
+              <a:t>12 ÷ 0,6 = 120 ÷ 6 = 20</a:t>
             </a:r>
           </a:p>
         </p:txBody>
@@ -15410,7 +15410,7 @@
             <a:pPr algn="ctr"/>
             <a:r>
               <a:rPr lang="en-GB" sz="3200" dirty="0"/>
-              <a:t>9 ÷ 0.5</a:t>
+              <a:t>9 ÷ 0,5</a:t>
             </a:r>
           </a:p>
         </p:txBody>
@@ -15523,7 +15523,7 @@
             <a:pPr algn="ctr"/>
             <a:r>
               <a:rPr lang="en-GB" sz="3200" dirty="0"/>
-              <a:t>4 ÷ 0.5 = 400 ÷ 5</a:t>
+              <a:t>4 ÷ 0,5 = 400 ÷ 5</a:t>
             </a:r>
           </a:p>
         </p:txBody>
@@ -15559,7 +15559,7 @@
             <a:pPr algn="ctr"/>
             <a:r>
               <a:rPr lang="en-GB" sz="3200" dirty="0"/>
-              <a:t>4 ÷ 0.8 = 5</a:t>
+              <a:t>4 ÷ 0,8 = 5</a:t>
             </a:r>
           </a:p>
         </p:txBody>
@@ -15595,7 +15595,7 @@
             <a:pPr algn="ctr"/>
             <a:r>
               <a:rPr lang="en-GB" sz="3200" dirty="0"/>
-              <a:t>36 ÷ 0.9 = 400</a:t>
+              <a:t>36 ÷ 0,9 = 400</a:t>
             </a:r>
           </a:p>
         </p:txBody>
@@ -15631,7 +15631,7 @@
             <a:pPr algn="ctr"/>
             <a:r>
               <a:rPr lang="en-GB" sz="3200" dirty="0"/>
-              <a:t>2 ÷ 0.25 = 200 ÷ 25 = 8 </a:t>
+              <a:t>2 ÷ 0,25 = 200 ÷ 25 = 8 </a:t>
             </a:r>
           </a:p>
         </p:txBody>
@@ -15667,7 +15667,7 @@
             <a:pPr algn="ctr"/>
             <a:r>
               <a:rPr lang="en-GB" sz="3200" dirty="0"/>
-              <a:t>15 ÷ 0.01 = 150</a:t>
+              <a:t>15 ÷ 0,01 = 150</a:t>
             </a:r>
           </a:p>
         </p:txBody>
@@ -15703,7 +15703,7 @@
             <a:pPr algn="ctr"/>
             <a:r>
               <a:rPr lang="en-GB" sz="3200" dirty="0"/>
-              <a:t>6 ÷ 0.02 = 200</a:t>
+              <a:t>6 ÷ 0,02 = 200</a:t>
             </a:r>
           </a:p>
         </p:txBody>
@@ -15739,7 +15739,7 @@
             <a:pPr algn="ctr"/>
             <a:r>
               <a:rPr lang="en-GB" sz="3200" dirty="0"/>
-              <a:t>5 ÷ 0.2 = 25</a:t>
+              <a:t>5 ÷ 0,2 = 25</a:t>
             </a:r>
           </a:p>
         </p:txBody>
